--- a/docs/saftimize-pitch.pptx
+++ b/docs/saftimize-pitch.pptx
@@ -5,7 +5,7 @@
     <p:sldMasterId id="2147483648" r:id="rId1"/>
   </p:sldMasterIdLst>
   <p:notesMasterIdLst>
-    <p:notesMasterId r:id="rId10"/>
+    <p:notesMasterId r:id="rId12"/>
   </p:notesMasterIdLst>
   <p:sldIdLst>
     <p:sldId id="256" r:id="rId2"/>
@@ -15,7 +15,9 @@
     <p:sldId id="260" r:id="rId6"/>
     <p:sldId id="261" r:id="rId7"/>
     <p:sldId id="262" r:id="rId8"/>
-    <p:sldId id="263" r:id="rId9"/>
+    <p:sldId id="264" r:id="rId9"/>
+    <p:sldId id="263" r:id="rId10"/>
+    <p:sldId id="265" r:id="rId11"/>
   </p:sldIdLst>
   <p:sldSz cx="9144000" cy="5143500" type="screen16x9"/>
   <p:notesSz cx="5143500" cy="9144000"/>
@@ -328,6 +330,114 @@
 </p:notes>
 </file>
 
+<file path=ppt/notesSlides/notesSlide10.xml><?xml version="1.0" encoding="utf-8"?>
+<p:notes xmlns:a="http://schemas.openxmlformats.org/drawingml/2006/main" xmlns:r="http://schemas.openxmlformats.org/officeDocument/2006/relationships" xmlns:p="http://schemas.openxmlformats.org/presentationml/2006/main">
+  <p:cSld>
+    <p:spTree>
+      <p:nvGrpSpPr>
+        <p:cNvPr id="1" name="">
+          <a:extLst>
+            <a:ext uri="{FF2B5EF4-FFF2-40B4-BE49-F238E27FC236}">
+              <a16:creationId xmlns:a16="http://schemas.microsoft.com/office/drawing/2014/main" id="{572F3B90-2A1B-2D1C-AA2A-091CC0EFAD3B}"/>
+            </a:ext>
+          </a:extLst>
+        </p:cNvPr>
+        <p:cNvGrpSpPr/>
+        <p:nvPr/>
+      </p:nvGrpSpPr>
+      <p:grpSpPr>
+        <a:xfrm>
+          <a:off x="0" y="0"/>
+          <a:ext cx="0" cy="0"/>
+          <a:chOff x="0" y="0"/>
+          <a:chExt cx="0" cy="0"/>
+        </a:xfrm>
+      </p:grpSpPr>
+      <p:sp>
+        <p:nvSpPr>
+          <p:cNvPr id="2" name="Slide Image Placeholder 1">
+            <a:extLst>
+              <a:ext uri="{FF2B5EF4-FFF2-40B4-BE49-F238E27FC236}">
+                <a16:creationId xmlns:a16="http://schemas.microsoft.com/office/drawing/2014/main" id="{47D5FEF7-371B-2C4B-E383-FC5661F3F4C6}"/>
+              </a:ext>
+            </a:extLst>
+          </p:cNvPr>
+          <p:cNvSpPr>
+            <a:spLocks noGrp="1" noRot="1" noChangeAspect="1"/>
+          </p:cNvSpPr>
+          <p:nvPr>
+            <p:ph type="sldImg"/>
+          </p:nvPr>
+        </p:nvSpPr>
+        <p:spPr/>
+      </p:sp>
+      <p:sp>
+        <p:nvSpPr>
+          <p:cNvPr id="3" name="Notes Placeholder 2">
+            <a:extLst>
+              <a:ext uri="{FF2B5EF4-FFF2-40B4-BE49-F238E27FC236}">
+                <a16:creationId xmlns:a16="http://schemas.microsoft.com/office/drawing/2014/main" id="{E9F397F3-43E4-1242-7D20-6E83DAC98D0D}"/>
+              </a:ext>
+            </a:extLst>
+          </p:cNvPr>
+          <p:cNvSpPr>
+            <a:spLocks noGrp="1"/>
+          </p:cNvSpPr>
+          <p:nvPr>
+            <p:ph type="body" idx="1"/>
+          </p:nvPr>
+        </p:nvSpPr>
+        <p:spPr/>
+        <p:txBody>
+          <a:bodyPr/>
+          <a:lstStyle/>
+          <a:p>
+            <a:endParaRPr lang="en-US" dirty="0"/>
+          </a:p>
+        </p:txBody>
+      </p:sp>
+      <p:sp>
+        <p:nvSpPr>
+          <p:cNvPr id="4" name="Slide Number Placeholder 3">
+            <a:extLst>
+              <a:ext uri="{FF2B5EF4-FFF2-40B4-BE49-F238E27FC236}">
+                <a16:creationId xmlns:a16="http://schemas.microsoft.com/office/drawing/2014/main" id="{6A004AA5-2579-BBF4-DA68-BC228AD59CED}"/>
+              </a:ext>
+            </a:extLst>
+          </p:cNvPr>
+          <p:cNvSpPr>
+            <a:spLocks noGrp="1"/>
+          </p:cNvSpPr>
+          <p:nvPr>
+            <p:ph type="sldNum" sz="quarter" idx="10"/>
+          </p:nvPr>
+        </p:nvSpPr>
+        <p:spPr/>
+        <p:txBody>
+          <a:bodyPr/>
+          <a:lstStyle/>
+          <a:p>
+            <a:fld id="{F7021451-1387-4CA6-816F-3879F97B5CBC}" type="slidenum">
+              <a:rPr lang="en-US"/>
+              <a:t>10</a:t>
+            </a:fld>
+            <a:endParaRPr lang="en-US"/>
+          </a:p>
+        </p:txBody>
+      </p:sp>
+    </p:spTree>
+    <p:extLst>
+      <p:ext uri="{BB962C8B-B14F-4D97-AF65-F5344CB8AC3E}">
+        <p14:creationId xmlns:p14="http://schemas.microsoft.com/office/powerpoint/2010/main" val="2706010524"/>
+      </p:ext>
+    </p:extLst>
+  </p:cSld>
+  <p:clrMapOvr>
+    <a:masterClrMapping/>
+  </p:clrMapOvr>
+</p:notes>
+</file>
+
 <file path=ppt/notesSlides/notesSlide2.xml><?xml version="1.0" encoding="utf-8"?>
 <p:notes xmlns:a="http://schemas.openxmlformats.org/drawingml/2006/main" xmlns:r="http://schemas.openxmlformats.org/officeDocument/2006/relationships" xmlns:p="http://schemas.openxmlformats.org/presentationml/2006/main">
   <p:cSld>
@@ -837,6 +947,114 @@
   <p:cSld>
     <p:spTree>
       <p:nvGrpSpPr>
+        <p:cNvPr id="1" name="">
+          <a:extLst>
+            <a:ext uri="{FF2B5EF4-FFF2-40B4-BE49-F238E27FC236}">
+              <a16:creationId xmlns:a16="http://schemas.microsoft.com/office/drawing/2014/main" id="{8B9F760D-A980-F020-33EF-8D543BCC70D9}"/>
+            </a:ext>
+          </a:extLst>
+        </p:cNvPr>
+        <p:cNvGrpSpPr/>
+        <p:nvPr/>
+      </p:nvGrpSpPr>
+      <p:grpSpPr>
+        <a:xfrm>
+          <a:off x="0" y="0"/>
+          <a:ext cx="0" cy="0"/>
+          <a:chOff x="0" y="0"/>
+          <a:chExt cx="0" cy="0"/>
+        </a:xfrm>
+      </p:grpSpPr>
+      <p:sp>
+        <p:nvSpPr>
+          <p:cNvPr id="2" name="Slide Image Placeholder 1">
+            <a:extLst>
+              <a:ext uri="{FF2B5EF4-FFF2-40B4-BE49-F238E27FC236}">
+                <a16:creationId xmlns:a16="http://schemas.microsoft.com/office/drawing/2014/main" id="{A58235ED-C7E7-94D0-1C19-43EB730E6B4D}"/>
+              </a:ext>
+            </a:extLst>
+          </p:cNvPr>
+          <p:cNvSpPr>
+            <a:spLocks noGrp="1" noRot="1" noChangeAspect="1"/>
+          </p:cNvSpPr>
+          <p:nvPr>
+            <p:ph type="sldImg"/>
+          </p:nvPr>
+        </p:nvSpPr>
+        <p:spPr/>
+      </p:sp>
+      <p:sp>
+        <p:nvSpPr>
+          <p:cNvPr id="3" name="Notes Placeholder 2">
+            <a:extLst>
+              <a:ext uri="{FF2B5EF4-FFF2-40B4-BE49-F238E27FC236}">
+                <a16:creationId xmlns:a16="http://schemas.microsoft.com/office/drawing/2014/main" id="{996B71E4-85D5-1801-28B9-7E0A0E95897F}"/>
+              </a:ext>
+            </a:extLst>
+          </p:cNvPr>
+          <p:cNvSpPr>
+            <a:spLocks noGrp="1"/>
+          </p:cNvSpPr>
+          <p:nvPr>
+            <p:ph type="body" idx="1"/>
+          </p:nvPr>
+        </p:nvSpPr>
+        <p:spPr/>
+        <p:txBody>
+          <a:bodyPr/>
+          <a:lstStyle/>
+          <a:p>
+            <a:endParaRPr lang="en-US" dirty="0"/>
+          </a:p>
+        </p:txBody>
+      </p:sp>
+      <p:sp>
+        <p:nvSpPr>
+          <p:cNvPr id="4" name="Slide Number Placeholder 3">
+            <a:extLst>
+              <a:ext uri="{FF2B5EF4-FFF2-40B4-BE49-F238E27FC236}">
+                <a16:creationId xmlns:a16="http://schemas.microsoft.com/office/drawing/2014/main" id="{E300D1E7-8FDD-26B5-A0A1-915DED8E6E57}"/>
+              </a:ext>
+            </a:extLst>
+          </p:cNvPr>
+          <p:cNvSpPr>
+            <a:spLocks noGrp="1"/>
+          </p:cNvSpPr>
+          <p:nvPr>
+            <p:ph type="sldNum" sz="quarter" idx="10"/>
+          </p:nvPr>
+        </p:nvSpPr>
+        <p:spPr/>
+        <p:txBody>
+          <a:bodyPr/>
+          <a:lstStyle/>
+          <a:p>
+            <a:fld id="{F7021451-1387-4CA6-816F-3879F97B5CBC}" type="slidenum">
+              <a:rPr lang="en-US"/>
+              <a:t>8</a:t>
+            </a:fld>
+            <a:endParaRPr lang="en-US"/>
+          </a:p>
+        </p:txBody>
+      </p:sp>
+    </p:spTree>
+    <p:extLst>
+      <p:ext uri="{BB962C8B-B14F-4D97-AF65-F5344CB8AC3E}">
+        <p14:creationId xmlns:p14="http://schemas.microsoft.com/office/powerpoint/2010/main" val="2531793034"/>
+      </p:ext>
+    </p:extLst>
+  </p:cSld>
+  <p:clrMapOvr>
+    <a:masterClrMapping/>
+  </p:clrMapOvr>
+</p:notes>
+</file>
+
+<file path=ppt/notesSlides/notesSlide9.xml><?xml version="1.0" encoding="utf-8"?>
+<p:notes xmlns:a="http://schemas.openxmlformats.org/drawingml/2006/main" xmlns:r="http://schemas.openxmlformats.org/officeDocument/2006/relationships" xmlns:p="http://schemas.openxmlformats.org/presentationml/2006/main">
+  <p:cSld>
+    <p:spTree>
+      <p:nvGrpSpPr>
         <p:cNvPr id="1" name=""/>
         <p:cNvGrpSpPr/>
         <p:nvPr/>
@@ -897,7 +1115,7 @@
           <a:p>
             <a:fld id="{F7021451-1387-4CA6-816F-3879F97B5CBC}" type="slidenum">
               <a:rPr lang="en-US"/>
-              <a:t>8</a:t>
+              <a:t>9</a:t>
             </a:fld>
             <a:endParaRPr lang="en-US"/>
           </a:p>
@@ -1659,6 +1877,231 @@
 </p:sld>
 </file>
 
+<file path=ppt/slides/slide10.xml><?xml version="1.0" encoding="utf-8"?>
+<p:sld xmlns:a="http://schemas.openxmlformats.org/drawingml/2006/main" xmlns:r="http://schemas.openxmlformats.org/officeDocument/2006/relationships" xmlns:p="http://schemas.openxmlformats.org/presentationml/2006/main">
+  <p:cSld>
+    <p:bg>
+      <p:bgPr>
+        <a:solidFill>
+          <a:srgbClr val="E9E0D9"/>
+        </a:solidFill>
+        <a:effectLst/>
+      </p:bgPr>
+    </p:bg>
+    <p:spTree>
+      <p:nvGrpSpPr>
+        <p:cNvPr id="1" name="">
+          <a:extLst>
+            <a:ext uri="{FF2B5EF4-FFF2-40B4-BE49-F238E27FC236}">
+              <a16:creationId xmlns:a16="http://schemas.microsoft.com/office/drawing/2014/main" id="{34EBD0C9-8B2D-32C0-ABF0-AC8F951BB4BD}"/>
+            </a:ext>
+          </a:extLst>
+        </p:cNvPr>
+        <p:cNvGrpSpPr/>
+        <p:nvPr/>
+      </p:nvGrpSpPr>
+      <p:grpSpPr>
+        <a:xfrm>
+          <a:off x="0" y="0"/>
+          <a:ext cx="0" cy="0"/>
+          <a:chOff x="0" y="0"/>
+          <a:chExt cx="0" cy="0"/>
+        </a:xfrm>
+      </p:grpSpPr>
+      <p:sp>
+        <p:nvSpPr>
+          <p:cNvPr id="2" name="Rectangle 1">
+            <a:extLst>
+              <a:ext uri="{FF2B5EF4-FFF2-40B4-BE49-F238E27FC236}">
+                <a16:creationId xmlns:a16="http://schemas.microsoft.com/office/drawing/2014/main" id="{C60F7D05-ABFE-CF57-686E-FAFBCD448F12}"/>
+              </a:ext>
+            </a:extLst>
+          </p:cNvPr>
+          <p:cNvSpPr/>
+          <p:nvPr/>
+        </p:nvSpPr>
+        <p:spPr>
+          <a:xfrm>
+            <a:off x="320040" y="320040"/>
+            <a:ext cx="502920" cy="502920"/>
+          </a:xfrm>
+          <a:prstGeom prst="rect">
+            <a:avLst/>
+          </a:prstGeom>
+          <a:solidFill>
+            <a:srgbClr val="2A2A2A"/>
+          </a:solidFill>
+          <a:ln>
+            <a:noFill/>
+          </a:ln>
+        </p:spPr>
+        <p:style>
+          <a:lnRef idx="1">
+            <a:schemeClr val="accent1"/>
+          </a:lnRef>
+          <a:fillRef idx="3">
+            <a:schemeClr val="accent1"/>
+          </a:fillRef>
+          <a:effectRef idx="2">
+            <a:schemeClr val="accent1"/>
+          </a:effectRef>
+          <a:fontRef idx="minor">
+            <a:schemeClr val="lt1"/>
+          </a:fontRef>
+        </p:style>
+        <p:txBody>
+          <a:bodyPr rtlCol="0" anchor="ctr"/>
+          <a:lstStyle/>
+          <a:p>
+            <a:pPr algn="ctr"/>
+            <a:endParaRPr/>
+          </a:p>
+        </p:txBody>
+      </p:sp>
+      <p:sp>
+        <p:nvSpPr>
+          <p:cNvPr id="4" name="TextBox 3">
+            <a:extLst>
+              <a:ext uri="{FF2B5EF4-FFF2-40B4-BE49-F238E27FC236}">
+                <a16:creationId xmlns:a16="http://schemas.microsoft.com/office/drawing/2014/main" id="{FE53107A-9B5D-1636-20B4-EDC86A41B1B9}"/>
+              </a:ext>
+            </a:extLst>
+          </p:cNvPr>
+          <p:cNvSpPr txBox="1"/>
+          <p:nvPr/>
+        </p:nvSpPr>
+        <p:spPr>
+          <a:xfrm>
+            <a:off x="960120" y="463778"/>
+            <a:ext cx="1645920" cy="215444"/>
+          </a:xfrm>
+          <a:prstGeom prst="rect">
+            <a:avLst/>
+          </a:prstGeom>
+          <a:noFill/>
+        </p:spPr>
+        <p:txBody>
+          <a:bodyPr wrap="square" lIns="0" tIns="0" rIns="0" bIns="0" anchor="ctr">
+            <a:spAutoFit/>
+          </a:bodyPr>
+          <a:lstStyle/>
+          <a:p>
+            <a:pPr algn="l"/>
+            <a:r>
+              <a:rPr sz="1400" b="0" dirty="0">
+                <a:solidFill>
+                  <a:srgbClr val="2A2A2A"/>
+                </a:solidFill>
+                <a:latin typeface="General Sans"/>
+              </a:rPr>
+              <a:t>/</a:t>
+            </a:r>
+            <a:r>
+              <a:rPr lang="de-CH" sz="1400" b="0" dirty="0" err="1">
+                <a:solidFill>
+                  <a:srgbClr val="2A2A2A"/>
+                </a:solidFill>
+                <a:latin typeface="General Sans"/>
+              </a:rPr>
+              <a:t>questions</a:t>
+            </a:r>
+            <a:endParaRPr sz="1400" b="0" dirty="0">
+              <a:solidFill>
+                <a:srgbClr val="2A2A2A"/>
+              </a:solidFill>
+              <a:latin typeface="General Sans"/>
+            </a:endParaRPr>
+          </a:p>
+        </p:txBody>
+      </p:sp>
+      <p:pic>
+        <p:nvPicPr>
+          <p:cNvPr id="30" name="Picture 29" descr="image.png">
+            <a:extLst>
+              <a:ext uri="{FF2B5EF4-FFF2-40B4-BE49-F238E27FC236}">
+                <a16:creationId xmlns:a16="http://schemas.microsoft.com/office/drawing/2014/main" id="{63BE8D78-C69D-3B4B-7887-A51F4CC061DD}"/>
+              </a:ext>
+            </a:extLst>
+          </p:cNvPr>
+          <p:cNvPicPr>
+            <a:picLocks noChangeAspect="1"/>
+          </p:cNvPicPr>
+          <p:nvPr/>
+        </p:nvPicPr>
+        <p:blipFill>
+          <a:blip r:embed="rId3"/>
+          <a:stretch>
+            <a:fillRect/>
+          </a:stretch>
+        </p:blipFill>
+        <p:spPr>
+          <a:xfrm>
+            <a:off x="411480" y="429768"/>
+            <a:ext cx="329184" cy="292608"/>
+          </a:xfrm>
+          <a:prstGeom prst="rect">
+            <a:avLst/>
+          </a:prstGeom>
+        </p:spPr>
+      </p:pic>
+      <p:sp>
+        <p:nvSpPr>
+          <p:cNvPr id="31" name="Text 3">
+            <a:extLst>
+              <a:ext uri="{FF2B5EF4-FFF2-40B4-BE49-F238E27FC236}">
+                <a16:creationId xmlns:a16="http://schemas.microsoft.com/office/drawing/2014/main" id="{FC15816B-1A90-9A71-15DE-1B7850FEB6B6}"/>
+              </a:ext>
+            </a:extLst>
+          </p:cNvPr>
+          <p:cNvSpPr txBox="1"/>
+          <p:nvPr/>
+        </p:nvSpPr>
+        <p:spPr>
+          <a:xfrm>
+            <a:off x="3344340" y="2360682"/>
+            <a:ext cx="2455319" cy="422136"/>
+          </a:xfrm>
+          <a:prstGeom prst="rect">
+            <a:avLst/>
+          </a:prstGeom>
+          <a:noFill/>
+          <a:ln/>
+        </p:spPr>
+        <p:txBody>
+          <a:bodyPr wrap="square" lIns="0" tIns="0" rIns="0" bIns="0" rtlCol="0" anchor="t"/>
+          <a:lstStyle/>
+          <a:p>
+            <a:pPr marL="0" indent="0">
+              <a:buNone/>
+            </a:pPr>
+            <a:r>
+              <a:rPr lang="en-US" sz="3200" dirty="0">
+                <a:solidFill>
+                  <a:srgbClr val="2A2A2A"/>
+                </a:solidFill>
+                <a:latin typeface="General Sans" pitchFamily="34" charset="0"/>
+                <a:ea typeface="General Sans" pitchFamily="34" charset="-122"/>
+                <a:cs typeface="General Sans" pitchFamily="34" charset="-120"/>
+              </a:rPr>
+              <a:t>Questions?</a:t>
+            </a:r>
+            <a:endParaRPr lang="en-US" sz="3200" dirty="0"/>
+          </a:p>
+        </p:txBody>
+      </p:sp>
+    </p:spTree>
+    <p:extLst>
+      <p:ext uri="{BB962C8B-B14F-4D97-AF65-F5344CB8AC3E}">
+        <p14:creationId xmlns:p14="http://schemas.microsoft.com/office/powerpoint/2010/main" val="1441713264"/>
+      </p:ext>
+    </p:extLst>
+  </p:cSld>
+  <p:clrMapOvr>
+    <a:masterClrMapping/>
+  </p:clrMapOvr>
+</p:sld>
+</file>
+
 <file path=ppt/slides/slide2.xml><?xml version="1.0" encoding="utf-8"?>
 <p:sld xmlns:a="http://schemas.openxmlformats.org/drawingml/2006/main" xmlns:r="http://schemas.openxmlformats.org/officeDocument/2006/relationships" xmlns:p="http://schemas.openxmlformats.org/presentationml/2006/main">
   <p:cSld name="Slide 2">
@@ -4654,7 +5097,7 @@
         </p:nvSpPr>
         <p:spPr>
           <a:xfrm>
-            <a:off x="3182112" y="987552"/>
+            <a:off x="3182112" y="1019556"/>
             <a:ext cx="475488" cy="256032"/>
           </a:xfrm>
           <a:prstGeom prst="rect">
@@ -4670,7 +5113,7 @@
           <a:p>
             <a:pPr algn="ctr"/>
             <a:r>
-              <a:rPr sz="1800" b="0">
+              <a:rPr sz="1800" b="0" dirty="0">
                 <a:solidFill>
                   <a:srgbClr val="2A2A2A"/>
                 </a:solidFill>
@@ -4803,7 +5246,7 @@
         </p:nvSpPr>
         <p:spPr>
           <a:xfrm>
-            <a:off x="3182112" y="1901952"/>
+            <a:off x="3182112" y="1933956"/>
             <a:ext cx="475488" cy="256032"/>
           </a:xfrm>
           <a:prstGeom prst="rect">
@@ -4952,7 +5395,7 @@
         </p:nvSpPr>
         <p:spPr>
           <a:xfrm>
-            <a:off x="3182112" y="2980944"/>
+            <a:off x="3182112" y="3012948"/>
             <a:ext cx="475488" cy="256032"/>
           </a:xfrm>
           <a:prstGeom prst="rect">
@@ -6634,7 +7077,31 @@
               <a:rPr sz="1019" b="0" dirty="0">
                 <a:latin typeface="General Sans"/>
               </a:rPr>
-              <a:t>ENTSO-E + Open-</a:t>
+              <a:t>ENTSO-E</a:t>
+            </a:r>
+            <a:r>
+              <a:rPr lang="de-CH" sz="1019" b="0" dirty="0">
+                <a:latin typeface="General Sans"/>
+              </a:rPr>
+              <a:t>, Powermeter @ </a:t>
+            </a:r>
+            <a:r>
+              <a:rPr lang="de-CH" sz="1019" b="0" dirty="0" err="1">
+                <a:latin typeface="General Sans"/>
+              </a:rPr>
+              <a:t>home</a:t>
+            </a:r>
+            <a:r>
+              <a:rPr lang="de-CH" sz="1019" b="0" dirty="0">
+                <a:latin typeface="General Sans"/>
+              </a:rPr>
+              <a:t>, </a:t>
+            </a:r>
+            <a:r>
+              <a:rPr sz="1019" b="0" dirty="0">
+                <a:latin typeface="General Sans"/>
+              </a:rPr>
+              <a:t> Open-</a:t>
             </a:r>
             <a:r>
               <a:rPr sz="1019" b="0" dirty="0" err="1">
@@ -6968,6 +7435,9 @@
               </a:rPr>
               <a:t>Postgres → later GCS</a:t>
             </a:r>
+            <a:endParaRPr lang="de-CH" sz="1019" dirty="0">
+              <a:latin typeface="General Sans"/>
+            </a:endParaRPr>
           </a:p>
         </p:txBody>
       </p:sp>
@@ -7297,7 +7767,61 @@
                 </a:solidFill>
                 <a:latin typeface="General Sans"/>
               </a:rPr>
-              <a:t>BigQuery</a:t>
+              <a:t>BigQuer</a:t>
+            </a:r>
+            <a:r>
+              <a:rPr lang="de-CH" sz="1019" dirty="0" err="1">
+                <a:solidFill>
+                  <a:srgbClr val="F4EFEA"/>
+                </a:solidFill>
+                <a:latin typeface="General Sans"/>
+              </a:rPr>
+              <a:t>y</a:t>
+            </a:r>
+            <a:r>
+              <a:rPr lang="de-CH" sz="1019" dirty="0">
+                <a:solidFill>
+                  <a:srgbClr val="F4EFEA"/>
+                </a:solidFill>
+                <a:latin typeface="General Sans"/>
+              </a:rPr>
+              <a:t> (</a:t>
+            </a:r>
+            <a:r>
+              <a:rPr lang="de-CH" sz="1019" dirty="0" err="1">
+                <a:solidFill>
+                  <a:srgbClr val="F4EFEA"/>
+                </a:solidFill>
+                <a:latin typeface="General Sans"/>
+              </a:rPr>
+              <a:t>if</a:t>
+            </a:r>
+            <a:r>
+              <a:rPr lang="de-CH" sz="1019" dirty="0">
+                <a:solidFill>
+                  <a:srgbClr val="F4EFEA"/>
+                </a:solidFill>
+                <a:latin typeface="General Sans"/>
+              </a:rPr>
+              <a:t> </a:t>
+            </a:r>
+            <a:r>
+              <a:rPr lang="de-CH" sz="1019" dirty="0" err="1">
+                <a:solidFill>
+                  <a:srgbClr val="F4EFEA"/>
+                </a:solidFill>
+                <a:latin typeface="General Sans"/>
+              </a:rPr>
+              <a:t>necessary</a:t>
+            </a:r>
+            <a:r>
+              <a:rPr lang="de-CH" sz="1019" dirty="0">
+                <a:solidFill>
+                  <a:srgbClr val="F4EFEA"/>
+                </a:solidFill>
+                <a:latin typeface="General Sans"/>
+              </a:rPr>
+              <a:t>)</a:t>
             </a:r>
             <a:endParaRPr sz="1019" dirty="0">
               <a:solidFill>
@@ -7382,8 +7906,68 @@
                 </a:solidFill>
                 <a:latin typeface="General Sans"/>
               </a:rPr>
-              <a:t>ORCHESTRATOR  ·  daily schedule  ·  retries  ·  backfills</a:t>
-            </a:r>
+              <a:t>ORCHESTRATOR  ·  daily schedule</a:t>
+            </a:r>
+            <a:r>
+              <a:rPr lang="de-CH" sz="1050" dirty="0">
+                <a:solidFill>
+                  <a:srgbClr val="2A2A2A"/>
+                </a:solidFill>
+                <a:latin typeface="General Sans"/>
+              </a:rPr>
+              <a:t> </a:t>
+            </a:r>
+            <a:r>
+              <a:rPr sz="1050" dirty="0">
+                <a:solidFill>
+                  <a:srgbClr val="2A2A2A"/>
+                </a:solidFill>
+                <a:latin typeface="General Sans"/>
+              </a:rPr>
+              <a:t> ·  </a:t>
+            </a:r>
+            <a:r>
+              <a:rPr lang="de-CH" sz="1050" dirty="0">
+                <a:solidFill>
+                  <a:srgbClr val="2A2A2A"/>
+                </a:solidFill>
+                <a:latin typeface="General Sans"/>
+              </a:rPr>
+              <a:t>safe </a:t>
+            </a:r>
+            <a:r>
+              <a:rPr lang="de-CH" sz="1050" dirty="0" err="1">
+                <a:solidFill>
+                  <a:srgbClr val="2A2A2A"/>
+                </a:solidFill>
+                <a:latin typeface="General Sans"/>
+              </a:rPr>
+              <a:t>reruns</a:t>
+            </a:r>
+            <a:r>
+              <a:rPr lang="de-CH" sz="1050" dirty="0">
+                <a:solidFill>
+                  <a:srgbClr val="2A2A2A"/>
+                </a:solidFill>
+                <a:latin typeface="General Sans"/>
+              </a:rPr>
+              <a:t> </a:t>
+            </a:r>
+            <a:r>
+              <a:rPr lang="en-GB" sz="1050" dirty="0">
+                <a:solidFill>
+                  <a:srgbClr val="2A2A2A"/>
+                </a:solidFill>
+                <a:latin typeface="General Sans"/>
+              </a:rPr>
+              <a:t>·  backfill (maybe)</a:t>
+            </a:r>
+            <a:endParaRPr sz="1050" dirty="0">
+              <a:solidFill>
+                <a:srgbClr val="2A2A2A"/>
+              </a:solidFill>
+              <a:latin typeface="General Sans"/>
+            </a:endParaRPr>
           </a:p>
         </p:txBody>
       </p:sp>
@@ -7652,6 +8236,95 @@
           </a:p>
         </p:txBody>
       </p:sp>
+      <p:sp>
+        <p:nvSpPr>
+          <p:cNvPr id="3" name="TextBox 2">
+            <a:extLst>
+              <a:ext uri="{FF2B5EF4-FFF2-40B4-BE49-F238E27FC236}">
+                <a16:creationId xmlns:a16="http://schemas.microsoft.com/office/drawing/2014/main" id="{D3FC62EA-D174-49C2-035C-3BCA61E25DB5}"/>
+              </a:ext>
+            </a:extLst>
+          </p:cNvPr>
+          <p:cNvSpPr txBox="1"/>
+          <p:nvPr/>
+        </p:nvSpPr>
+        <p:spPr>
+          <a:xfrm>
+            <a:off x="4681728" y="1150776"/>
+            <a:ext cx="3520440" cy="123111"/>
+          </a:xfrm>
+          <a:prstGeom prst="rect">
+            <a:avLst/>
+          </a:prstGeom>
+          <a:noFill/>
+        </p:spPr>
+        <p:txBody>
+          <a:bodyPr wrap="square" lIns="0" tIns="0" rIns="0" bIns="0">
+            <a:spAutoFit/>
+          </a:bodyPr>
+          <a:lstStyle/>
+          <a:p>
+            <a:pPr algn="l"/>
+            <a:r>
+              <a:rPr lang="de-CH" sz="800" b="0" dirty="0">
+                <a:latin typeface="General Sans"/>
+              </a:rPr>
+              <a:t>Powermeter will </a:t>
+            </a:r>
+            <a:r>
+              <a:rPr lang="de-CH" sz="800" b="0" dirty="0" err="1">
+                <a:latin typeface="General Sans"/>
+              </a:rPr>
+              <a:t>be</a:t>
+            </a:r>
+            <a:r>
+              <a:rPr lang="de-CH" sz="800" b="0" dirty="0">
+                <a:latin typeface="General Sans"/>
+              </a:rPr>
+              <a:t> </a:t>
+            </a:r>
+            <a:r>
+              <a:rPr lang="de-CH" sz="800" b="0" dirty="0" err="1">
+                <a:latin typeface="General Sans"/>
+              </a:rPr>
+              <a:t>replaced</a:t>
+            </a:r>
+            <a:r>
+              <a:rPr lang="de-CH" sz="800" b="0" dirty="0">
+                <a:latin typeface="General Sans"/>
+              </a:rPr>
+              <a:t> by ENTSO-E for </a:t>
+            </a:r>
+            <a:r>
+              <a:rPr lang="de-CH" sz="800" b="0" dirty="0" err="1">
+                <a:latin typeface="General Sans"/>
+              </a:rPr>
+              <a:t>this</a:t>
+            </a:r>
+            <a:r>
+              <a:rPr lang="de-CH" sz="800" b="0" dirty="0">
+                <a:latin typeface="General Sans"/>
+              </a:rPr>
+              <a:t> </a:t>
+            </a:r>
+            <a:r>
+              <a:rPr lang="de-CH" sz="800" b="0" dirty="0" err="1">
+                <a:latin typeface="General Sans"/>
+              </a:rPr>
+              <a:t>project</a:t>
+            </a:r>
+            <a:r>
+              <a:rPr lang="de-CH" sz="800" b="0" dirty="0">
+                <a:latin typeface="General Sans"/>
+              </a:rPr>
+              <a:t>.</a:t>
+            </a:r>
+            <a:endParaRPr sz="800" b="0" dirty="0">
+              <a:latin typeface="General Sans"/>
+            </a:endParaRPr>
+          </a:p>
+        </p:txBody>
+      </p:sp>
     </p:spTree>
   </p:cSld>
   <p:clrMapOvr>
@@ -7661,6 +8334,1240 @@
 </file>
 
 <file path=ppt/slides/slide8.xml><?xml version="1.0" encoding="utf-8"?>
+<p:sld xmlns:a="http://schemas.openxmlformats.org/drawingml/2006/main" xmlns:r="http://schemas.openxmlformats.org/officeDocument/2006/relationships" xmlns:p="http://schemas.openxmlformats.org/presentationml/2006/main">
+  <p:cSld>
+    <p:bg>
+      <p:bgPr>
+        <a:solidFill>
+          <a:srgbClr val="E9E0D9"/>
+        </a:solidFill>
+        <a:effectLst/>
+      </p:bgPr>
+    </p:bg>
+    <p:spTree>
+      <p:nvGrpSpPr>
+        <p:cNvPr id="1" name="">
+          <a:extLst>
+            <a:ext uri="{FF2B5EF4-FFF2-40B4-BE49-F238E27FC236}">
+              <a16:creationId xmlns:a16="http://schemas.microsoft.com/office/drawing/2014/main" id="{6DEDEA0C-EC01-EA94-B012-3F41179E8BAE}"/>
+            </a:ext>
+          </a:extLst>
+        </p:cNvPr>
+        <p:cNvGrpSpPr/>
+        <p:nvPr/>
+      </p:nvGrpSpPr>
+      <p:grpSpPr>
+        <a:xfrm>
+          <a:off x="0" y="0"/>
+          <a:ext cx="0" cy="0"/>
+          <a:chOff x="0" y="0"/>
+          <a:chExt cx="0" cy="0"/>
+        </a:xfrm>
+      </p:grpSpPr>
+      <p:sp>
+        <p:nvSpPr>
+          <p:cNvPr id="2" name="Rectangle 1">
+            <a:extLst>
+              <a:ext uri="{FF2B5EF4-FFF2-40B4-BE49-F238E27FC236}">
+                <a16:creationId xmlns:a16="http://schemas.microsoft.com/office/drawing/2014/main" id="{CAC8B205-C695-240D-BFC7-6521789EED8C}"/>
+              </a:ext>
+            </a:extLst>
+          </p:cNvPr>
+          <p:cNvSpPr/>
+          <p:nvPr/>
+        </p:nvSpPr>
+        <p:spPr>
+          <a:xfrm>
+            <a:off x="320040" y="320040"/>
+            <a:ext cx="502920" cy="502920"/>
+          </a:xfrm>
+          <a:prstGeom prst="rect">
+            <a:avLst/>
+          </a:prstGeom>
+          <a:solidFill>
+            <a:srgbClr val="2A2A2A"/>
+          </a:solidFill>
+          <a:ln>
+            <a:noFill/>
+          </a:ln>
+        </p:spPr>
+        <p:style>
+          <a:lnRef idx="1">
+            <a:schemeClr val="accent1"/>
+          </a:lnRef>
+          <a:fillRef idx="3">
+            <a:schemeClr val="accent1"/>
+          </a:fillRef>
+          <a:effectRef idx="2">
+            <a:schemeClr val="accent1"/>
+          </a:effectRef>
+          <a:fontRef idx="minor">
+            <a:schemeClr val="lt1"/>
+          </a:fontRef>
+        </p:style>
+        <p:txBody>
+          <a:bodyPr rtlCol="0" anchor="ctr"/>
+          <a:lstStyle/>
+          <a:p>
+            <a:pPr algn="ctr"/>
+            <a:endParaRPr/>
+          </a:p>
+        </p:txBody>
+      </p:sp>
+      <p:sp>
+        <p:nvSpPr>
+          <p:cNvPr id="4" name="TextBox 3">
+            <a:extLst>
+              <a:ext uri="{FF2B5EF4-FFF2-40B4-BE49-F238E27FC236}">
+                <a16:creationId xmlns:a16="http://schemas.microsoft.com/office/drawing/2014/main" id="{86B435E2-3580-A92E-8804-4BFBCC4A8D3E}"/>
+              </a:ext>
+            </a:extLst>
+          </p:cNvPr>
+          <p:cNvSpPr txBox="1"/>
+          <p:nvPr/>
+        </p:nvSpPr>
+        <p:spPr>
+          <a:xfrm>
+            <a:off x="960120" y="463778"/>
+            <a:ext cx="1645920" cy="215444"/>
+          </a:xfrm>
+          <a:prstGeom prst="rect">
+            <a:avLst/>
+          </a:prstGeom>
+          <a:noFill/>
+        </p:spPr>
+        <p:txBody>
+          <a:bodyPr wrap="square" lIns="0" tIns="0" rIns="0" bIns="0" anchor="ctr">
+            <a:spAutoFit/>
+          </a:bodyPr>
+          <a:lstStyle/>
+          <a:p>
+            <a:pPr algn="l"/>
+            <a:r>
+              <a:rPr sz="1400" b="0" dirty="0">
+                <a:solidFill>
+                  <a:srgbClr val="2A2A2A"/>
+                </a:solidFill>
+                <a:latin typeface="General Sans"/>
+              </a:rPr>
+              <a:t>/</a:t>
+            </a:r>
+            <a:r>
+              <a:rPr lang="de-CH" sz="1400" dirty="0" err="1">
+                <a:solidFill>
+                  <a:srgbClr val="2A2A2A"/>
+                </a:solidFill>
+                <a:latin typeface="General Sans"/>
+              </a:rPr>
+              <a:t>challenges</a:t>
+            </a:r>
+            <a:endParaRPr sz="1400" b="0" dirty="0">
+              <a:solidFill>
+                <a:srgbClr val="2A2A2A"/>
+              </a:solidFill>
+              <a:latin typeface="General Sans"/>
+            </a:endParaRPr>
+          </a:p>
+        </p:txBody>
+      </p:sp>
+      <p:sp>
+        <p:nvSpPr>
+          <p:cNvPr id="6" name="Rounded Rectangle 5">
+            <a:extLst>
+              <a:ext uri="{FF2B5EF4-FFF2-40B4-BE49-F238E27FC236}">
+                <a16:creationId xmlns:a16="http://schemas.microsoft.com/office/drawing/2014/main" id="{587EA3FA-0B3D-68E8-AFFE-D9D610EADD08}"/>
+              </a:ext>
+            </a:extLst>
+          </p:cNvPr>
+          <p:cNvSpPr/>
+          <p:nvPr/>
+        </p:nvSpPr>
+        <p:spPr>
+          <a:xfrm>
+            <a:off x="2743200" y="182880"/>
+            <a:ext cx="6217920" cy="4754880"/>
+          </a:xfrm>
+          <a:prstGeom prst="roundRect">
+            <a:avLst/>
+          </a:prstGeom>
+          <a:solidFill>
+            <a:srgbClr val="2A2A2A"/>
+          </a:solidFill>
+          <a:ln>
+            <a:noFill/>
+          </a:ln>
+        </p:spPr>
+        <p:style>
+          <a:lnRef idx="1">
+            <a:schemeClr val="accent1"/>
+          </a:lnRef>
+          <a:fillRef idx="3">
+            <a:schemeClr val="accent1"/>
+          </a:fillRef>
+          <a:effectRef idx="2">
+            <a:schemeClr val="accent1"/>
+          </a:effectRef>
+          <a:fontRef idx="minor">
+            <a:schemeClr val="lt1"/>
+          </a:fontRef>
+        </p:style>
+        <p:txBody>
+          <a:bodyPr rtlCol="0" anchor="ctr"/>
+          <a:lstStyle/>
+          <a:p>
+            <a:pPr algn="ctr"/>
+            <a:endParaRPr/>
+          </a:p>
+        </p:txBody>
+      </p:sp>
+      <p:sp>
+        <p:nvSpPr>
+          <p:cNvPr id="7" name="TextBox 6">
+            <a:extLst>
+              <a:ext uri="{FF2B5EF4-FFF2-40B4-BE49-F238E27FC236}">
+                <a16:creationId xmlns:a16="http://schemas.microsoft.com/office/drawing/2014/main" id="{925DEFBD-A416-9476-9977-6FFE8EC9B485}"/>
+              </a:ext>
+            </a:extLst>
+          </p:cNvPr>
+          <p:cNvSpPr txBox="1"/>
+          <p:nvPr/>
+        </p:nvSpPr>
+        <p:spPr>
+          <a:xfrm>
+            <a:off x="3154680" y="502920"/>
+            <a:ext cx="2542032" cy="146194"/>
+          </a:xfrm>
+          <a:prstGeom prst="rect">
+            <a:avLst/>
+          </a:prstGeom>
+          <a:noFill/>
+        </p:spPr>
+        <p:txBody>
+          <a:bodyPr wrap="square" lIns="0" tIns="0" rIns="0" bIns="0">
+            <a:spAutoFit/>
+          </a:bodyPr>
+          <a:lstStyle/>
+          <a:p>
+            <a:pPr algn="l"/>
+            <a:r>
+              <a:rPr lang="de-CH" sz="950" b="1" dirty="0">
+                <a:solidFill>
+                  <a:srgbClr val="96D9A7"/>
+                </a:solidFill>
+                <a:latin typeface="General Sans"/>
+              </a:rPr>
+              <a:t>LOOKING FORWARD TO SOLVING</a:t>
+            </a:r>
+            <a:endParaRPr sz="950" b="1" dirty="0">
+              <a:solidFill>
+                <a:srgbClr val="96D9A7"/>
+              </a:solidFill>
+              <a:latin typeface="General Sans"/>
+            </a:endParaRPr>
+          </a:p>
+        </p:txBody>
+      </p:sp>
+      <p:sp>
+        <p:nvSpPr>
+          <p:cNvPr id="8" name="Rounded Rectangle 7">
+            <a:extLst>
+              <a:ext uri="{FF2B5EF4-FFF2-40B4-BE49-F238E27FC236}">
+                <a16:creationId xmlns:a16="http://schemas.microsoft.com/office/drawing/2014/main" id="{6F779E5D-485A-2E20-817B-9A42AFBDA259}"/>
+              </a:ext>
+            </a:extLst>
+          </p:cNvPr>
+          <p:cNvSpPr/>
+          <p:nvPr/>
+        </p:nvSpPr>
+        <p:spPr>
+          <a:xfrm>
+            <a:off x="3154680" y="1078882"/>
+            <a:ext cx="2560320" cy="1417320"/>
+          </a:xfrm>
+          <a:prstGeom prst="roundRect">
+            <a:avLst/>
+          </a:prstGeom>
+          <a:solidFill>
+            <a:srgbClr val="F4EFEA"/>
+          </a:solidFill>
+          <a:ln>
+            <a:noFill/>
+          </a:ln>
+        </p:spPr>
+        <p:style>
+          <a:lnRef idx="1">
+            <a:schemeClr val="accent1"/>
+          </a:lnRef>
+          <a:fillRef idx="3">
+            <a:schemeClr val="accent1"/>
+          </a:fillRef>
+          <a:effectRef idx="2">
+            <a:schemeClr val="accent1"/>
+          </a:effectRef>
+          <a:fontRef idx="minor">
+            <a:schemeClr val="lt1"/>
+          </a:fontRef>
+        </p:style>
+        <p:txBody>
+          <a:bodyPr rtlCol="0" anchor="ctr"/>
+          <a:lstStyle/>
+          <a:p>
+            <a:pPr algn="ctr"/>
+            <a:endParaRPr/>
+          </a:p>
+        </p:txBody>
+      </p:sp>
+      <p:sp>
+        <p:nvSpPr>
+          <p:cNvPr id="9" name="TextBox 8">
+            <a:extLst>
+              <a:ext uri="{FF2B5EF4-FFF2-40B4-BE49-F238E27FC236}">
+                <a16:creationId xmlns:a16="http://schemas.microsoft.com/office/drawing/2014/main" id="{4E7BEBF9-03D4-3313-77E4-BD7B24459930}"/>
+              </a:ext>
+            </a:extLst>
+          </p:cNvPr>
+          <p:cNvSpPr txBox="1"/>
+          <p:nvPr/>
+        </p:nvSpPr>
+        <p:spPr>
+          <a:xfrm>
+            <a:off x="3364992" y="1234330"/>
+            <a:ext cx="411480" cy="182880"/>
+          </a:xfrm>
+          <a:prstGeom prst="rect">
+            <a:avLst/>
+          </a:prstGeom>
+          <a:noFill/>
+        </p:spPr>
+        <p:txBody>
+          <a:bodyPr wrap="square" lIns="0" tIns="0" rIns="0" bIns="0">
+            <a:spAutoFit/>
+          </a:bodyPr>
+          <a:lstStyle/>
+          <a:p>
+            <a:pPr algn="l"/>
+            <a:r>
+              <a:rPr sz="900" b="1">
+                <a:solidFill>
+                  <a:srgbClr val="6D6864"/>
+                </a:solidFill>
+                <a:latin typeface="General Sans"/>
+              </a:rPr>
+              <a:t>01</a:t>
+            </a:r>
+          </a:p>
+        </p:txBody>
+      </p:sp>
+      <p:sp>
+        <p:nvSpPr>
+          <p:cNvPr id="10" name="TextBox 9">
+            <a:extLst>
+              <a:ext uri="{FF2B5EF4-FFF2-40B4-BE49-F238E27FC236}">
+                <a16:creationId xmlns:a16="http://schemas.microsoft.com/office/drawing/2014/main" id="{92A73B9C-746C-8EAD-B784-F192E6CC0C5F}"/>
+              </a:ext>
+            </a:extLst>
+          </p:cNvPr>
+          <p:cNvSpPr txBox="1"/>
+          <p:nvPr/>
+        </p:nvSpPr>
+        <p:spPr>
+          <a:xfrm>
+            <a:off x="3364992" y="1508650"/>
+            <a:ext cx="2057400" cy="800219"/>
+          </a:xfrm>
+          <a:prstGeom prst="rect">
+            <a:avLst/>
+          </a:prstGeom>
+          <a:noFill/>
+        </p:spPr>
+        <p:txBody>
+          <a:bodyPr wrap="square" lIns="0" tIns="0" rIns="0" bIns="0">
+            <a:spAutoFit/>
+          </a:bodyPr>
+          <a:lstStyle/>
+          <a:p>
+            <a:pPr algn="l"/>
+            <a:r>
+              <a:rPr lang="de-CH" sz="2600" b="0" dirty="0">
+                <a:solidFill>
+                  <a:srgbClr val="2A2A2A"/>
+                </a:solidFill>
+                <a:latin typeface="Instrument Serif"/>
+              </a:rPr>
+              <a:t>Temporal </a:t>
+            </a:r>
+            <a:r>
+              <a:rPr lang="de-CH" sz="2600" b="0" dirty="0" err="1">
+                <a:solidFill>
+                  <a:srgbClr val="2A2A2A"/>
+                </a:solidFill>
+                <a:latin typeface="Instrument Serif"/>
+              </a:rPr>
+              <a:t>alignment</a:t>
+            </a:r>
+            <a:endParaRPr sz="2600" b="0" dirty="0">
+              <a:solidFill>
+                <a:srgbClr val="2A2A2A"/>
+              </a:solidFill>
+              <a:latin typeface="Instrument Serif"/>
+            </a:endParaRPr>
+          </a:p>
+        </p:txBody>
+      </p:sp>
+      <p:sp>
+        <p:nvSpPr>
+          <p:cNvPr id="12" name="Rounded Rectangle 11">
+            <a:extLst>
+              <a:ext uri="{FF2B5EF4-FFF2-40B4-BE49-F238E27FC236}">
+                <a16:creationId xmlns:a16="http://schemas.microsoft.com/office/drawing/2014/main" id="{A4F6527E-8502-C11A-1333-975F9A22CF22}"/>
+              </a:ext>
+            </a:extLst>
+          </p:cNvPr>
+          <p:cNvSpPr/>
+          <p:nvPr/>
+        </p:nvSpPr>
+        <p:spPr>
+          <a:xfrm>
+            <a:off x="5943600" y="1078882"/>
+            <a:ext cx="2560320" cy="1417320"/>
+          </a:xfrm>
+          <a:prstGeom prst="roundRect">
+            <a:avLst/>
+          </a:prstGeom>
+          <a:solidFill>
+            <a:srgbClr val="96D9A7"/>
+          </a:solidFill>
+          <a:ln>
+            <a:noFill/>
+          </a:ln>
+        </p:spPr>
+        <p:style>
+          <a:lnRef idx="1">
+            <a:schemeClr val="accent1"/>
+          </a:lnRef>
+          <a:fillRef idx="3">
+            <a:schemeClr val="accent1"/>
+          </a:fillRef>
+          <a:effectRef idx="2">
+            <a:schemeClr val="accent1"/>
+          </a:effectRef>
+          <a:fontRef idx="minor">
+            <a:schemeClr val="lt1"/>
+          </a:fontRef>
+        </p:style>
+        <p:txBody>
+          <a:bodyPr rtlCol="0" anchor="ctr"/>
+          <a:lstStyle/>
+          <a:p>
+            <a:pPr algn="ctr"/>
+            <a:endParaRPr/>
+          </a:p>
+        </p:txBody>
+      </p:sp>
+      <p:sp>
+        <p:nvSpPr>
+          <p:cNvPr id="13" name="TextBox 12">
+            <a:extLst>
+              <a:ext uri="{FF2B5EF4-FFF2-40B4-BE49-F238E27FC236}">
+                <a16:creationId xmlns:a16="http://schemas.microsoft.com/office/drawing/2014/main" id="{CC1BD6AF-C18A-C6FC-8859-721D8D634E5F}"/>
+              </a:ext>
+            </a:extLst>
+          </p:cNvPr>
+          <p:cNvSpPr txBox="1"/>
+          <p:nvPr/>
+        </p:nvSpPr>
+        <p:spPr>
+          <a:xfrm>
+            <a:off x="6153912" y="1234330"/>
+            <a:ext cx="411480" cy="182880"/>
+          </a:xfrm>
+          <a:prstGeom prst="rect">
+            <a:avLst/>
+          </a:prstGeom>
+          <a:noFill/>
+        </p:spPr>
+        <p:txBody>
+          <a:bodyPr wrap="square" lIns="0" tIns="0" rIns="0" bIns="0">
+            <a:spAutoFit/>
+          </a:bodyPr>
+          <a:lstStyle/>
+          <a:p>
+            <a:pPr algn="l"/>
+            <a:r>
+              <a:rPr sz="900" b="1">
+                <a:solidFill>
+                  <a:srgbClr val="2A2A2A"/>
+                </a:solidFill>
+                <a:latin typeface="General Sans"/>
+              </a:rPr>
+              <a:t>02</a:t>
+            </a:r>
+          </a:p>
+        </p:txBody>
+      </p:sp>
+      <p:sp>
+        <p:nvSpPr>
+          <p:cNvPr id="14" name="TextBox 13">
+            <a:extLst>
+              <a:ext uri="{FF2B5EF4-FFF2-40B4-BE49-F238E27FC236}">
+                <a16:creationId xmlns:a16="http://schemas.microsoft.com/office/drawing/2014/main" id="{9791D841-5178-4F9A-65A7-2F4AC310B421}"/>
+              </a:ext>
+            </a:extLst>
+          </p:cNvPr>
+          <p:cNvSpPr txBox="1"/>
+          <p:nvPr/>
+        </p:nvSpPr>
+        <p:spPr>
+          <a:xfrm>
+            <a:off x="6153912" y="1508650"/>
+            <a:ext cx="2057400" cy="800219"/>
+          </a:xfrm>
+          <a:prstGeom prst="rect">
+            <a:avLst/>
+          </a:prstGeom>
+          <a:noFill/>
+        </p:spPr>
+        <p:txBody>
+          <a:bodyPr wrap="square" lIns="0" tIns="0" rIns="0" bIns="0">
+            <a:spAutoFit/>
+          </a:bodyPr>
+          <a:lstStyle/>
+          <a:p>
+            <a:pPr algn="l"/>
+            <a:r>
+              <a:rPr lang="de-CH" sz="2600" b="0" dirty="0">
+                <a:solidFill>
+                  <a:srgbClr val="2A2A2A"/>
+                </a:solidFill>
+                <a:latin typeface="Instrument Serif"/>
+              </a:rPr>
+              <a:t>API </a:t>
+            </a:r>
+            <a:br>
+              <a:rPr lang="de-CH" sz="2600" b="0" dirty="0">
+                <a:solidFill>
+                  <a:srgbClr val="2A2A2A"/>
+                </a:solidFill>
+                <a:latin typeface="Instrument Serif"/>
+              </a:rPr>
+            </a:br>
+            <a:r>
+              <a:rPr lang="de-CH" sz="2600" b="0" dirty="0" err="1">
+                <a:solidFill>
+                  <a:srgbClr val="2A2A2A"/>
+                </a:solidFill>
+                <a:latin typeface="Instrument Serif"/>
+              </a:rPr>
+              <a:t>Reachability</a:t>
+            </a:r>
+            <a:endParaRPr sz="2600" b="0" dirty="0">
+              <a:solidFill>
+                <a:srgbClr val="2A2A2A"/>
+              </a:solidFill>
+              <a:latin typeface="Instrument Serif"/>
+            </a:endParaRPr>
+          </a:p>
+        </p:txBody>
+      </p:sp>
+      <p:sp>
+        <p:nvSpPr>
+          <p:cNvPr id="18" name="TextBox 17">
+            <a:extLst>
+              <a:ext uri="{FF2B5EF4-FFF2-40B4-BE49-F238E27FC236}">
+                <a16:creationId xmlns:a16="http://schemas.microsoft.com/office/drawing/2014/main" id="{E9F0C7EE-74D8-CE18-8868-DFFB007E187D}"/>
+              </a:ext>
+            </a:extLst>
+          </p:cNvPr>
+          <p:cNvSpPr txBox="1"/>
+          <p:nvPr/>
+        </p:nvSpPr>
+        <p:spPr>
+          <a:xfrm>
+            <a:off x="3364992" y="2496202"/>
+            <a:ext cx="2148840" cy="228600"/>
+          </a:xfrm>
+          <a:prstGeom prst="rect">
+            <a:avLst/>
+          </a:prstGeom>
+          <a:noFill/>
+        </p:spPr>
+        <p:txBody>
+          <a:bodyPr wrap="square" lIns="0" tIns="0" rIns="0" bIns="0">
+            <a:spAutoFit/>
+          </a:bodyPr>
+          <a:lstStyle/>
+          <a:p>
+            <a:pPr algn="l"/>
+            <a:r>
+              <a:rPr sz="1300" b="0">
+                <a:solidFill>
+                  <a:srgbClr val="2A2A2A"/>
+                </a:solidFill>
+                <a:latin typeface="Instrument Serif"/>
+              </a:rPr>
+              <a:t>ENTSO-E actual load</a:t>
+            </a:r>
+          </a:p>
+        </p:txBody>
+      </p:sp>
+      <p:sp>
+        <p:nvSpPr>
+          <p:cNvPr id="19" name="TextBox 18">
+            <a:extLst>
+              <a:ext uri="{FF2B5EF4-FFF2-40B4-BE49-F238E27FC236}">
+                <a16:creationId xmlns:a16="http://schemas.microsoft.com/office/drawing/2014/main" id="{B8D7303C-2310-533F-F34A-50BA666626D9}"/>
+              </a:ext>
+            </a:extLst>
+          </p:cNvPr>
+          <p:cNvSpPr txBox="1"/>
+          <p:nvPr/>
+        </p:nvSpPr>
+        <p:spPr>
+          <a:xfrm>
+            <a:off x="3364992" y="2788810"/>
+            <a:ext cx="2331720" cy="692497"/>
+          </a:xfrm>
+          <a:prstGeom prst="rect">
+            <a:avLst/>
+          </a:prstGeom>
+          <a:noFill/>
+        </p:spPr>
+        <p:txBody>
+          <a:bodyPr wrap="square" lIns="0" tIns="0" rIns="0" bIns="0">
+            <a:spAutoFit/>
+          </a:bodyPr>
+          <a:lstStyle/>
+          <a:p>
+            <a:pPr algn="l"/>
+            <a:r>
+              <a:rPr sz="900" b="0" dirty="0" err="1">
+                <a:solidFill>
+                  <a:srgbClr val="2A2A2A"/>
+                </a:solidFill>
+                <a:latin typeface="General Sans"/>
+              </a:rPr>
+              <a:t>DateTime</a:t>
+            </a:r>
+            <a:r>
+              <a:rPr sz="900" b="0" dirty="0">
+                <a:solidFill>
+                  <a:srgbClr val="2A2A2A"/>
+                </a:solidFill>
+                <a:latin typeface="General Sans"/>
+              </a:rPr>
+              <a:t>(UTC)
+</a:t>
+            </a:r>
+            <a:r>
+              <a:rPr sz="900" b="0" dirty="0" err="1">
+                <a:solidFill>
+                  <a:srgbClr val="2A2A2A"/>
+                </a:solidFill>
+                <a:latin typeface="General Sans"/>
+              </a:rPr>
+              <a:t>ResolutionCode</a:t>
+            </a:r>
+            <a:r>
+              <a:rPr sz="900" b="0" dirty="0">
+                <a:solidFill>
+                  <a:srgbClr val="2A2A2A"/>
+                </a:solidFill>
+                <a:latin typeface="General Sans"/>
+              </a:rPr>
+              <a:t> · </a:t>
+            </a:r>
+            <a:r>
+              <a:rPr sz="900" b="0" dirty="0" err="1">
+                <a:solidFill>
+                  <a:srgbClr val="2A2A2A"/>
+                </a:solidFill>
+                <a:latin typeface="General Sans"/>
+              </a:rPr>
+              <a:t>AreaCode</a:t>
+            </a:r>
+            <a:r>
+              <a:rPr sz="900" b="0" dirty="0">
+                <a:solidFill>
+                  <a:srgbClr val="2A2A2A"/>
+                </a:solidFill>
+                <a:latin typeface="General Sans"/>
+              </a:rPr>
+              <a:t> · </a:t>
+            </a:r>
+            <a:r>
+              <a:rPr sz="900" b="0" dirty="0" err="1">
+                <a:solidFill>
+                  <a:srgbClr val="2A2A2A"/>
+                </a:solidFill>
+                <a:latin typeface="General Sans"/>
+              </a:rPr>
+              <a:t>AreaDisplayName</a:t>
+            </a:r>
+            <a:r>
+              <a:rPr sz="900" b="0" dirty="0">
+                <a:solidFill>
+                  <a:srgbClr val="2A2A2A"/>
+                </a:solidFill>
+                <a:latin typeface="General Sans"/>
+              </a:rPr>
+              <a:t>
+</a:t>
+            </a:r>
+            <a:r>
+              <a:rPr sz="900" b="0" dirty="0" err="1">
+                <a:solidFill>
+                  <a:srgbClr val="2A2A2A"/>
+                </a:solidFill>
+                <a:latin typeface="General Sans"/>
+              </a:rPr>
+              <a:t>AreaTypeCode</a:t>
+            </a:r>
+            <a:r>
+              <a:rPr sz="900" b="0" dirty="0">
+                <a:solidFill>
+                  <a:srgbClr val="2A2A2A"/>
+                </a:solidFill>
+                <a:latin typeface="General Sans"/>
+              </a:rPr>
+              <a:t> · </a:t>
+            </a:r>
+            <a:r>
+              <a:rPr sz="900" b="0" dirty="0" err="1">
+                <a:solidFill>
+                  <a:srgbClr val="2A2A2A"/>
+                </a:solidFill>
+                <a:latin typeface="General Sans"/>
+              </a:rPr>
+              <a:t>AreaMapCode</a:t>
+            </a:r>
+            <a:r>
+              <a:rPr sz="900" b="0" dirty="0">
+                <a:solidFill>
+                  <a:srgbClr val="2A2A2A"/>
+                </a:solidFill>
+                <a:latin typeface="General Sans"/>
+              </a:rPr>
+              <a:t>
+</a:t>
+            </a:r>
+            <a:r>
+              <a:rPr sz="900" b="0" dirty="0" err="1">
+                <a:solidFill>
+                  <a:srgbClr val="2A2A2A"/>
+                </a:solidFill>
+                <a:latin typeface="General Sans"/>
+              </a:rPr>
+              <a:t>TotalLoad</a:t>
+            </a:r>
+            <a:r>
+              <a:rPr sz="900" b="0" dirty="0">
+                <a:solidFill>
+                  <a:srgbClr val="2A2A2A"/>
+                </a:solidFill>
+                <a:latin typeface="General Sans"/>
+              </a:rPr>
+              <a:t>[MW] · </a:t>
+            </a:r>
+            <a:r>
+              <a:rPr sz="900" b="0" dirty="0" err="1">
+                <a:solidFill>
+                  <a:srgbClr val="2A2A2A"/>
+                </a:solidFill>
+                <a:latin typeface="General Sans"/>
+              </a:rPr>
+              <a:t>UpdateTime</a:t>
+            </a:r>
+            <a:r>
+              <a:rPr sz="900" b="0" dirty="0">
+                <a:solidFill>
+                  <a:srgbClr val="2A2A2A"/>
+                </a:solidFill>
+                <a:latin typeface="General Sans"/>
+              </a:rPr>
+              <a:t>(UTC)</a:t>
+            </a:r>
+          </a:p>
+        </p:txBody>
+      </p:sp>
+      <p:sp>
+        <p:nvSpPr>
+          <p:cNvPr id="20" name="TextBox 19">
+            <a:extLst>
+              <a:ext uri="{FF2B5EF4-FFF2-40B4-BE49-F238E27FC236}">
+                <a16:creationId xmlns:a16="http://schemas.microsoft.com/office/drawing/2014/main" id="{808AA119-E75F-36E0-4628-36D67E711AAD}"/>
+              </a:ext>
+            </a:extLst>
+          </p:cNvPr>
+          <p:cNvSpPr txBox="1"/>
+          <p:nvPr/>
+        </p:nvSpPr>
+        <p:spPr>
+          <a:xfrm>
+            <a:off x="5943600" y="2496202"/>
+            <a:ext cx="2148840" cy="228600"/>
+          </a:xfrm>
+          <a:prstGeom prst="rect">
+            <a:avLst/>
+          </a:prstGeom>
+          <a:noFill/>
+        </p:spPr>
+        <p:txBody>
+          <a:bodyPr wrap="square" lIns="0" tIns="0" rIns="0" bIns="0">
+            <a:spAutoFit/>
+          </a:bodyPr>
+          <a:lstStyle/>
+          <a:p>
+            <a:pPr algn="l"/>
+            <a:r>
+              <a:rPr sz="1300" b="0">
+                <a:solidFill>
+                  <a:srgbClr val="2A2A2A"/>
+                </a:solidFill>
+                <a:latin typeface="Instrument Serif"/>
+              </a:rPr>
+              <a:t>ENTSO-E day-ahead price</a:t>
+            </a:r>
+          </a:p>
+        </p:txBody>
+      </p:sp>
+      <p:sp>
+        <p:nvSpPr>
+          <p:cNvPr id="21" name="TextBox 20">
+            <a:extLst>
+              <a:ext uri="{FF2B5EF4-FFF2-40B4-BE49-F238E27FC236}">
+                <a16:creationId xmlns:a16="http://schemas.microsoft.com/office/drawing/2014/main" id="{00372E20-AF43-42AF-9501-BE7D3A500CD8}"/>
+              </a:ext>
+            </a:extLst>
+          </p:cNvPr>
+          <p:cNvSpPr txBox="1"/>
+          <p:nvPr/>
+        </p:nvSpPr>
+        <p:spPr>
+          <a:xfrm>
+            <a:off x="5943600" y="2788810"/>
+            <a:ext cx="2212848" cy="692497"/>
+          </a:xfrm>
+          <a:prstGeom prst="rect">
+            <a:avLst/>
+          </a:prstGeom>
+          <a:noFill/>
+        </p:spPr>
+        <p:txBody>
+          <a:bodyPr wrap="square" lIns="0" tIns="0" rIns="0" bIns="0">
+            <a:spAutoFit/>
+          </a:bodyPr>
+          <a:lstStyle/>
+          <a:p>
+            <a:pPr algn="l"/>
+            <a:r>
+              <a:rPr sz="900" b="0">
+                <a:solidFill>
+                  <a:srgbClr val="2A2A2A"/>
+                </a:solidFill>
+                <a:latin typeface="General Sans"/>
+              </a:rPr>
+              <a:t>InstanceCode · DateTime(UTC) · ResolutionCode
+AreaCode · ContractType · Sequence
+Price[Currency/MWh] · Currency · UpdateTime(UTC)</a:t>
+            </a:r>
+          </a:p>
+        </p:txBody>
+      </p:sp>
+      <p:pic>
+        <p:nvPicPr>
+          <p:cNvPr id="25" name="Picture 24" descr="image.png">
+            <a:extLst>
+              <a:ext uri="{FF2B5EF4-FFF2-40B4-BE49-F238E27FC236}">
+                <a16:creationId xmlns:a16="http://schemas.microsoft.com/office/drawing/2014/main" id="{D843A4EC-8C94-BAE6-08FD-1F15C5DBBE0D}"/>
+              </a:ext>
+            </a:extLst>
+          </p:cNvPr>
+          <p:cNvPicPr>
+            <a:picLocks noChangeAspect="1"/>
+          </p:cNvPicPr>
+          <p:nvPr/>
+        </p:nvPicPr>
+        <p:blipFill>
+          <a:blip r:embed="rId3"/>
+          <a:stretch>
+            <a:fillRect/>
+          </a:stretch>
+        </p:blipFill>
+        <p:spPr>
+          <a:xfrm>
+            <a:off x="411480" y="429768"/>
+            <a:ext cx="329184" cy="292608"/>
+          </a:xfrm>
+          <a:prstGeom prst="rect">
+            <a:avLst/>
+          </a:prstGeom>
+        </p:spPr>
+      </p:pic>
+      <p:sp>
+        <p:nvSpPr>
+          <p:cNvPr id="26" name="Text 3">
+            <a:extLst>
+              <a:ext uri="{FF2B5EF4-FFF2-40B4-BE49-F238E27FC236}">
+                <a16:creationId xmlns:a16="http://schemas.microsoft.com/office/drawing/2014/main" id="{EB2529BF-E130-384E-8B6E-E50FEA55993B}"/>
+              </a:ext>
+            </a:extLst>
+          </p:cNvPr>
+          <p:cNvSpPr txBox="1"/>
+          <p:nvPr/>
+        </p:nvSpPr>
+        <p:spPr>
+          <a:xfrm>
+            <a:off x="320040" y="3520440"/>
+            <a:ext cx="2377440" cy="1280160"/>
+          </a:xfrm>
+          <a:prstGeom prst="rect">
+            <a:avLst/>
+          </a:prstGeom>
+          <a:noFill/>
+          <a:ln/>
+        </p:spPr>
+        <p:txBody>
+          <a:bodyPr wrap="square" lIns="0" tIns="0" rIns="0" bIns="0" rtlCol="0" anchor="b"/>
+          <a:lstStyle/>
+          <a:p>
+            <a:pPr marL="0" indent="0">
+              <a:buNone/>
+            </a:pPr>
+            <a:r>
+              <a:rPr lang="en-US" sz="2000" dirty="0">
+                <a:solidFill>
+                  <a:srgbClr val="2A2A2A"/>
+                </a:solidFill>
+                <a:latin typeface="General Sans" pitchFamily="34" charset="0"/>
+                <a:ea typeface="General Sans" pitchFamily="34" charset="-122"/>
+                <a:cs typeface="General Sans" pitchFamily="34" charset="-120"/>
+              </a:rPr>
+              <a:t>Challenges.</a:t>
+            </a:r>
+            <a:endParaRPr lang="en-US" sz="2000" dirty="0"/>
+          </a:p>
+        </p:txBody>
+      </p:sp>
+      <p:sp>
+        <p:nvSpPr>
+          <p:cNvPr id="5" name="Rounded Rectangle 4">
+            <a:extLst>
+              <a:ext uri="{FF2B5EF4-FFF2-40B4-BE49-F238E27FC236}">
+                <a16:creationId xmlns:a16="http://schemas.microsoft.com/office/drawing/2014/main" id="{34FBEF9C-562C-C41B-59FF-451C05043D1E}"/>
+              </a:ext>
+            </a:extLst>
+          </p:cNvPr>
+          <p:cNvSpPr/>
+          <p:nvPr/>
+        </p:nvSpPr>
+        <p:spPr>
+          <a:xfrm>
+            <a:off x="5943600" y="2692799"/>
+            <a:ext cx="2560320" cy="1417320"/>
+          </a:xfrm>
+          <a:prstGeom prst="roundRect">
+            <a:avLst/>
+          </a:prstGeom>
+          <a:solidFill>
+            <a:srgbClr val="F4EFEA"/>
+          </a:solidFill>
+          <a:ln>
+            <a:noFill/>
+          </a:ln>
+        </p:spPr>
+        <p:style>
+          <a:lnRef idx="1">
+            <a:schemeClr val="accent1"/>
+          </a:lnRef>
+          <a:fillRef idx="3">
+            <a:schemeClr val="accent1"/>
+          </a:fillRef>
+          <a:effectRef idx="2">
+            <a:schemeClr val="accent1"/>
+          </a:effectRef>
+          <a:fontRef idx="minor">
+            <a:schemeClr val="lt1"/>
+          </a:fontRef>
+        </p:style>
+        <p:txBody>
+          <a:bodyPr rtlCol="0" anchor="ctr"/>
+          <a:lstStyle/>
+          <a:p>
+            <a:pPr algn="ctr"/>
+            <a:endParaRPr/>
+          </a:p>
+        </p:txBody>
+      </p:sp>
+      <p:sp>
+        <p:nvSpPr>
+          <p:cNvPr id="27" name="TextBox 26">
+            <a:extLst>
+              <a:ext uri="{FF2B5EF4-FFF2-40B4-BE49-F238E27FC236}">
+                <a16:creationId xmlns:a16="http://schemas.microsoft.com/office/drawing/2014/main" id="{4A66D2A5-0D00-784E-B8D5-6864A523D059}"/>
+              </a:ext>
+            </a:extLst>
+          </p:cNvPr>
+          <p:cNvSpPr txBox="1"/>
+          <p:nvPr/>
+        </p:nvSpPr>
+        <p:spPr>
+          <a:xfrm>
+            <a:off x="6153912" y="2848247"/>
+            <a:ext cx="411480" cy="138499"/>
+          </a:xfrm>
+          <a:prstGeom prst="rect">
+            <a:avLst/>
+          </a:prstGeom>
+          <a:noFill/>
+        </p:spPr>
+        <p:txBody>
+          <a:bodyPr wrap="square" lIns="0" tIns="0" rIns="0" bIns="0">
+            <a:spAutoFit/>
+          </a:bodyPr>
+          <a:lstStyle/>
+          <a:p>
+            <a:pPr algn="l"/>
+            <a:r>
+              <a:rPr sz="900" b="1" dirty="0">
+                <a:solidFill>
+                  <a:srgbClr val="6D6864"/>
+                </a:solidFill>
+                <a:latin typeface="General Sans"/>
+              </a:rPr>
+              <a:t>0</a:t>
+            </a:r>
+            <a:r>
+              <a:rPr lang="de-CH" sz="900" b="1" dirty="0">
+                <a:solidFill>
+                  <a:srgbClr val="6D6864"/>
+                </a:solidFill>
+                <a:latin typeface="General Sans"/>
+              </a:rPr>
+              <a:t>4</a:t>
+            </a:r>
+            <a:endParaRPr sz="900" b="1" dirty="0">
+              <a:solidFill>
+                <a:srgbClr val="6D6864"/>
+              </a:solidFill>
+              <a:latin typeface="General Sans"/>
+            </a:endParaRPr>
+          </a:p>
+        </p:txBody>
+      </p:sp>
+      <p:sp>
+        <p:nvSpPr>
+          <p:cNvPr id="28" name="TextBox 27">
+            <a:extLst>
+              <a:ext uri="{FF2B5EF4-FFF2-40B4-BE49-F238E27FC236}">
+                <a16:creationId xmlns:a16="http://schemas.microsoft.com/office/drawing/2014/main" id="{FCB8A911-39A1-BA66-B33E-9A75A8099589}"/>
+              </a:ext>
+            </a:extLst>
+          </p:cNvPr>
+          <p:cNvSpPr txBox="1"/>
+          <p:nvPr/>
+        </p:nvSpPr>
+        <p:spPr>
+          <a:xfrm>
+            <a:off x="6153912" y="3122567"/>
+            <a:ext cx="2057400" cy="400110"/>
+          </a:xfrm>
+          <a:prstGeom prst="rect">
+            <a:avLst/>
+          </a:prstGeom>
+          <a:noFill/>
+        </p:spPr>
+        <p:txBody>
+          <a:bodyPr wrap="square" lIns="0" tIns="0" rIns="0" bIns="0">
+            <a:spAutoFit/>
+          </a:bodyPr>
+          <a:lstStyle/>
+          <a:p>
+            <a:pPr algn="l"/>
+            <a:r>
+              <a:rPr lang="de-CH" sz="2600" b="0" dirty="0">
+                <a:solidFill>
+                  <a:srgbClr val="2A2A2A"/>
+                </a:solidFill>
+                <a:latin typeface="Instrument Serif"/>
+              </a:rPr>
+              <a:t>Scope Creep</a:t>
+            </a:r>
+            <a:endParaRPr sz="2600" b="0" dirty="0">
+              <a:solidFill>
+                <a:srgbClr val="2A2A2A"/>
+              </a:solidFill>
+              <a:latin typeface="Instrument Serif"/>
+            </a:endParaRPr>
+          </a:p>
+        </p:txBody>
+      </p:sp>
+      <p:sp>
+        <p:nvSpPr>
+          <p:cNvPr id="29" name="Rounded Rectangle 28">
+            <a:extLst>
+              <a:ext uri="{FF2B5EF4-FFF2-40B4-BE49-F238E27FC236}">
+                <a16:creationId xmlns:a16="http://schemas.microsoft.com/office/drawing/2014/main" id="{8FEA349F-B738-9118-5703-935CFB7F5418}"/>
+              </a:ext>
+            </a:extLst>
+          </p:cNvPr>
+          <p:cNvSpPr/>
+          <p:nvPr/>
+        </p:nvSpPr>
+        <p:spPr>
+          <a:xfrm>
+            <a:off x="3154680" y="2692799"/>
+            <a:ext cx="2560320" cy="1417320"/>
+          </a:xfrm>
+          <a:prstGeom prst="roundRect">
+            <a:avLst/>
+          </a:prstGeom>
+          <a:solidFill>
+            <a:srgbClr val="96D9A7"/>
+          </a:solidFill>
+          <a:ln>
+            <a:noFill/>
+          </a:ln>
+        </p:spPr>
+        <p:style>
+          <a:lnRef idx="1">
+            <a:schemeClr val="accent1"/>
+          </a:lnRef>
+          <a:fillRef idx="3">
+            <a:schemeClr val="accent1"/>
+          </a:fillRef>
+          <a:effectRef idx="2">
+            <a:schemeClr val="accent1"/>
+          </a:effectRef>
+          <a:fontRef idx="minor">
+            <a:schemeClr val="lt1"/>
+          </a:fontRef>
+        </p:style>
+        <p:txBody>
+          <a:bodyPr rtlCol="0" anchor="ctr"/>
+          <a:lstStyle/>
+          <a:p>
+            <a:pPr algn="ctr"/>
+            <a:endParaRPr/>
+          </a:p>
+        </p:txBody>
+      </p:sp>
+      <p:sp>
+        <p:nvSpPr>
+          <p:cNvPr id="30" name="TextBox 29">
+            <a:extLst>
+              <a:ext uri="{FF2B5EF4-FFF2-40B4-BE49-F238E27FC236}">
+                <a16:creationId xmlns:a16="http://schemas.microsoft.com/office/drawing/2014/main" id="{00CE42C4-2BA4-1D40-B746-66E0D3AD3F81}"/>
+              </a:ext>
+            </a:extLst>
+          </p:cNvPr>
+          <p:cNvSpPr txBox="1"/>
+          <p:nvPr/>
+        </p:nvSpPr>
+        <p:spPr>
+          <a:xfrm>
+            <a:off x="3364992" y="2848247"/>
+            <a:ext cx="411480" cy="138499"/>
+          </a:xfrm>
+          <a:prstGeom prst="rect">
+            <a:avLst/>
+          </a:prstGeom>
+          <a:noFill/>
+        </p:spPr>
+        <p:txBody>
+          <a:bodyPr wrap="square" lIns="0" tIns="0" rIns="0" bIns="0">
+            <a:spAutoFit/>
+          </a:bodyPr>
+          <a:lstStyle/>
+          <a:p>
+            <a:pPr algn="l"/>
+            <a:r>
+              <a:rPr sz="900" b="1" dirty="0">
+                <a:solidFill>
+                  <a:srgbClr val="2A2A2A"/>
+                </a:solidFill>
+                <a:latin typeface="General Sans"/>
+              </a:rPr>
+              <a:t>0</a:t>
+            </a:r>
+            <a:r>
+              <a:rPr lang="de-CH" sz="900" b="1" dirty="0">
+                <a:solidFill>
+                  <a:srgbClr val="2A2A2A"/>
+                </a:solidFill>
+                <a:latin typeface="General Sans"/>
+              </a:rPr>
+              <a:t>3</a:t>
+            </a:r>
+            <a:endParaRPr sz="900" b="1" dirty="0">
+              <a:solidFill>
+                <a:srgbClr val="2A2A2A"/>
+              </a:solidFill>
+              <a:latin typeface="General Sans"/>
+            </a:endParaRPr>
+          </a:p>
+        </p:txBody>
+      </p:sp>
+      <p:sp>
+        <p:nvSpPr>
+          <p:cNvPr id="31" name="TextBox 30">
+            <a:extLst>
+              <a:ext uri="{FF2B5EF4-FFF2-40B4-BE49-F238E27FC236}">
+                <a16:creationId xmlns:a16="http://schemas.microsoft.com/office/drawing/2014/main" id="{12490520-2543-D799-86FF-55560509BD67}"/>
+              </a:ext>
+            </a:extLst>
+          </p:cNvPr>
+          <p:cNvSpPr txBox="1"/>
+          <p:nvPr/>
+        </p:nvSpPr>
+        <p:spPr>
+          <a:xfrm>
+            <a:off x="3364992" y="3122567"/>
+            <a:ext cx="2057400" cy="400110"/>
+          </a:xfrm>
+          <a:prstGeom prst="rect">
+            <a:avLst/>
+          </a:prstGeom>
+          <a:noFill/>
+        </p:spPr>
+        <p:txBody>
+          <a:bodyPr wrap="square" lIns="0" tIns="0" rIns="0" bIns="0">
+            <a:spAutoFit/>
+          </a:bodyPr>
+          <a:lstStyle/>
+          <a:p>
+            <a:pPr algn="l"/>
+            <a:r>
+              <a:rPr lang="de-CH" sz="2600" b="0" dirty="0">
+                <a:solidFill>
+                  <a:srgbClr val="2A2A2A"/>
+                </a:solidFill>
+                <a:latin typeface="Instrument Serif"/>
+              </a:rPr>
+              <a:t>DST</a:t>
+            </a:r>
+            <a:endParaRPr sz="2600" b="0" dirty="0">
+              <a:solidFill>
+                <a:srgbClr val="2A2A2A"/>
+              </a:solidFill>
+              <a:latin typeface="Instrument Serif"/>
+            </a:endParaRPr>
+          </a:p>
+        </p:txBody>
+      </p:sp>
+    </p:spTree>
+    <p:extLst>
+      <p:ext uri="{BB962C8B-B14F-4D97-AF65-F5344CB8AC3E}">
+        <p14:creationId xmlns:p14="http://schemas.microsoft.com/office/powerpoint/2010/main" val="2050629668"/>
+      </p:ext>
+    </p:extLst>
+  </p:cSld>
+  <p:clrMapOvr>
+    <a:masterClrMapping/>
+  </p:clrMapOvr>
+</p:sld>
+</file>
+
+<file path=ppt/slides/slide9.xml><?xml version="1.0" encoding="utf-8"?>
 <p:sld xmlns:a="http://schemas.openxmlformats.org/drawingml/2006/main" xmlns:r="http://schemas.openxmlformats.org/officeDocument/2006/relationships" xmlns:p="http://schemas.openxmlformats.org/presentationml/2006/main">
   <p:cSld name="Slide 8">
     <p:bg>
